--- a/sqlserver-sql/presentation/sqlserver-dql-string-functions.pptx
+++ b/sqlserver-sql/presentation/sqlserver-dql-string-functions.pptx
@@ -3850,7 +3850,7 @@
             </a:pPr>
             <a:r>
               <a:rPr sz="1800" b="1" dirty="0"/>
-              <a:t>ISNULL Function (ISNULL):</a:t>
+              <a:t>Conditional and NULL Handling - ISNULL Function (ISNULL):</a:t>
             </a:r>
           </a:p>
           <a:p>
@@ -3973,7 +3973,7 @@
             </a:pPr>
             <a:r>
               <a:rPr sz="1800" b="1" dirty="0"/>
-              <a:t>Coalesce Function (COALESCE):</a:t>
+              <a:t>Conditional and NULL Handling - COALESCE Function (COALESCE):</a:t>
             </a:r>
           </a:p>
           <a:p>
@@ -7845,7 +7845,7 @@
             </a:pPr>
             <a:r>
               <a:rPr sz="1800" b="1" dirty="0"/>
-              <a:t>Case Statement (CASE):</a:t>
+              <a:t>Conditional and NULL Handling - CASE Expression (CASE):</a:t>
             </a:r>
           </a:p>
           <a:p>
